--- a/app/templates/instituto/plantilla_diplomado.pptx
+++ b/app/templates/instituto/plantilla_diplomado.pptx
@@ -119,6 +119,146 @@
 </p:presentation>
 </file>
 
+<file path=ppt/revisionInfo.xml><?xml version="1.0" encoding="utf-8"?>
+<p1510:revInfo xmlns:a="http://schemas.openxmlformats.org/drawingml/2006/main" xmlns:r="http://schemas.openxmlformats.org/officeDocument/2006/relationships" xmlns:p1510="http://schemas.microsoft.com/office/powerpoint/2015/10/main">
+  <p1510:revLst>
+    <p1510:client id="{9893D3FA-2315-4EC3-B510-217BF57289AF}" v="14" dt="2026-03-05T19:02:52.947"/>
+  </p1510:revLst>
+</p1510:revInfo>
+</file>
+
+<file path=ppt/changesInfos/changesInfo1.xml><?xml version="1.0" encoding="utf-8"?>
+<pc:chgInfo xmlns:a="http://schemas.openxmlformats.org/drawingml/2006/main" xmlns:r="http://schemas.openxmlformats.org/officeDocument/2006/relationships" xmlns:ac="http://schemas.microsoft.com/office/drawing/2013/main/command" xmlns:pc="http://schemas.microsoft.com/office/powerpoint/2013/main/command">
+  <pc:docChgLst>
+    <pc:chgData name="Benjamín de Jesús Cueva Niño de Guzmán" userId="56da303013910523" providerId="LiveId" clId="{532B7A48-8887-4F62-9537-0BA1FAE83637}"/>
+    <pc:docChg chg="undo custSel modSld">
+      <pc:chgData name="Benjamín de Jesús Cueva Niño de Guzmán" userId="56da303013910523" providerId="LiveId" clId="{532B7A48-8887-4F62-9537-0BA1FAE83637}" dt="2026-03-05T19:02:59.794" v="197"/>
+      <pc:docMkLst>
+        <pc:docMk/>
+      </pc:docMkLst>
+      <pc:sldChg chg="delSp modSp mod">
+        <pc:chgData name="Benjamín de Jesús Cueva Niño de Guzmán" userId="56da303013910523" providerId="LiveId" clId="{532B7A48-8887-4F62-9537-0BA1FAE83637}" dt="2026-03-05T18:31:22.544" v="190" actId="1035"/>
+        <pc:sldMkLst>
+          <pc:docMk/>
+          <pc:sldMk cId="3524957515" sldId="338"/>
+        </pc:sldMkLst>
+        <pc:spChg chg="del mod ord">
+          <ac:chgData name="Benjamín de Jesús Cueva Niño de Guzmán" userId="56da303013910523" providerId="LiveId" clId="{532B7A48-8887-4F62-9537-0BA1FAE83637}" dt="2026-03-04T22:01:20.803" v="180" actId="478"/>
+          <ac:spMkLst>
+            <pc:docMk/>
+            <pc:sldMk cId="3524957515" sldId="338"/>
+            <ac:spMk id="2" creationId="{FEAA4293-5045-7AA5-190D-88DFB9E5E5EA}"/>
+          </ac:spMkLst>
+        </pc:spChg>
+        <pc:spChg chg="mod">
+          <ac:chgData name="Benjamín de Jesús Cueva Niño de Guzmán" userId="56da303013910523" providerId="LiveId" clId="{532B7A48-8887-4F62-9537-0BA1FAE83637}" dt="2026-03-02T06:13:54.134" v="2" actId="1035"/>
+          <ac:spMkLst>
+            <pc:docMk/>
+            <pc:sldMk cId="3524957515" sldId="338"/>
+            <ac:spMk id="15" creationId="{00000000-0000-0000-0000-000000000000}"/>
+          </ac:spMkLst>
+        </pc:spChg>
+        <pc:spChg chg="mod">
+          <ac:chgData name="Benjamín de Jesús Cueva Niño de Guzmán" userId="56da303013910523" providerId="LiveId" clId="{532B7A48-8887-4F62-9537-0BA1FAE83637}" dt="2026-03-02T06:14:00.367" v="10" actId="1035"/>
+          <ac:spMkLst>
+            <pc:docMk/>
+            <pc:sldMk cId="3524957515" sldId="338"/>
+            <ac:spMk id="16" creationId="{00000000-0000-0000-0000-000000000000}"/>
+          </ac:spMkLst>
+        </pc:spChg>
+        <pc:spChg chg="del mod">
+          <ac:chgData name="Benjamín de Jesús Cueva Niño de Guzmán" userId="56da303013910523" providerId="LiveId" clId="{532B7A48-8887-4F62-9537-0BA1FAE83637}" dt="2026-03-04T22:01:10.797" v="178" actId="478"/>
+          <ac:spMkLst>
+            <pc:docMk/>
+            <pc:sldMk cId="3524957515" sldId="338"/>
+            <ac:spMk id="18" creationId="{00000000-0000-0000-0000-000000000000}"/>
+          </ac:spMkLst>
+        </pc:spChg>
+        <pc:spChg chg="del mod">
+          <ac:chgData name="Benjamín de Jesús Cueva Niño de Guzmán" userId="56da303013910523" providerId="LiveId" clId="{532B7A48-8887-4F62-9537-0BA1FAE83637}" dt="2026-03-04T22:01:13.537" v="179" actId="478"/>
+          <ac:spMkLst>
+            <pc:docMk/>
+            <pc:sldMk cId="3524957515" sldId="338"/>
+            <ac:spMk id="20" creationId="{00000000-0000-0000-0000-000000000000}"/>
+          </ac:spMkLst>
+        </pc:spChg>
+        <pc:spChg chg="mod">
+          <ac:chgData name="Benjamín de Jesús Cueva Niño de Guzmán" userId="56da303013910523" providerId="LiveId" clId="{532B7A48-8887-4F62-9537-0BA1FAE83637}" dt="2026-03-05T18:31:22.544" v="190" actId="1035"/>
+          <ac:spMkLst>
+            <pc:docMk/>
+            <pc:sldMk cId="3524957515" sldId="338"/>
+            <ac:spMk id="31" creationId="{00000000-0000-0000-0000-000000000000}"/>
+          </ac:spMkLst>
+        </pc:spChg>
+        <pc:spChg chg="mod">
+          <ac:chgData name="Benjamín de Jesús Cueva Niño de Guzmán" userId="56da303013910523" providerId="LiveId" clId="{532B7A48-8887-4F62-9537-0BA1FAE83637}" dt="2026-03-02T06:13:56.214" v="5" actId="1035"/>
+          <ac:spMkLst>
+            <pc:docMk/>
+            <pc:sldMk cId="3524957515" sldId="338"/>
+            <ac:spMk id="33" creationId="{00000000-0000-0000-0000-000000000000}"/>
+          </ac:spMkLst>
+        </pc:spChg>
+      </pc:sldChg>
+      <pc:sldChg chg="addSp delSp modSp mod">
+        <pc:chgData name="Benjamín de Jesús Cueva Niño de Guzmán" userId="56da303013910523" providerId="LiveId" clId="{532B7A48-8887-4F62-9537-0BA1FAE83637}" dt="2026-03-05T19:02:59.794" v="197"/>
+        <pc:sldMkLst>
+          <pc:docMk/>
+          <pc:sldMk cId="2249577745" sldId="339"/>
+        </pc:sldMkLst>
+        <pc:spChg chg="del">
+          <ac:chgData name="Benjamín de Jesús Cueva Niño de Guzmán" userId="56da303013910523" providerId="LiveId" clId="{532B7A48-8887-4F62-9537-0BA1FAE83637}" dt="2026-03-05T19:02:41.197" v="191" actId="478"/>
+          <ac:spMkLst>
+            <pc:docMk/>
+            <pc:sldMk cId="2249577745" sldId="339"/>
+            <ac:spMk id="7" creationId="{05C52596-06F9-34E5-BF0B-633F1D4E78A2}"/>
+          </ac:spMkLst>
+        </pc:spChg>
+        <pc:spChg chg="add mod">
+          <ac:chgData name="Benjamín de Jesús Cueva Niño de Guzmán" userId="56da303013910523" providerId="LiveId" clId="{532B7A48-8887-4F62-9537-0BA1FAE83637}" dt="2026-03-05T19:02:42.189" v="193"/>
+          <ac:spMkLst>
+            <pc:docMk/>
+            <pc:sldMk cId="2249577745" sldId="339"/>
+            <ac:spMk id="8" creationId="{1BD7C6F0-73B6-617B-0B21-594BAED95EBF}"/>
+          </ac:spMkLst>
+        </pc:spChg>
+        <pc:spChg chg="add mod">
+          <ac:chgData name="Benjamín de Jesús Cueva Niño de Guzmán" userId="56da303013910523" providerId="LiveId" clId="{532B7A48-8887-4F62-9537-0BA1FAE83637}" dt="2026-03-05T19:02:52.947" v="194"/>
+          <ac:spMkLst>
+            <pc:docMk/>
+            <pc:sldMk cId="2249577745" sldId="339"/>
+            <ac:spMk id="9" creationId="{69756D5F-F72B-4A51-481B-0F48F851A7E8}"/>
+          </ac:spMkLst>
+        </pc:spChg>
+        <pc:spChg chg="mod">
+          <ac:chgData name="Benjamín de Jesús Cueva Niño de Guzmán" userId="56da303013910523" providerId="LiveId" clId="{532B7A48-8887-4F62-9537-0BA1FAE83637}" dt="2026-03-02T06:19:08.077" v="163" actId="962"/>
+          <ac:spMkLst>
+            <pc:docMk/>
+            <pc:sldMk cId="2249577745" sldId="339"/>
+            <ac:spMk id="15" creationId="{00000000-0000-0000-0000-000000000000}"/>
+          </ac:spMkLst>
+        </pc:spChg>
+        <pc:graphicFrameChg chg="modGraphic">
+          <ac:chgData name="Benjamín de Jesús Cueva Niño de Guzmán" userId="56da303013910523" providerId="LiveId" clId="{532B7A48-8887-4F62-9537-0BA1FAE83637}" dt="2026-03-05T19:02:59.794" v="197"/>
+          <ac:graphicFrameMkLst>
+            <pc:docMk/>
+            <pc:sldMk cId="2249577745" sldId="339"/>
+            <ac:graphicFrameMk id="18" creationId="{00000000-0000-0000-0000-000000000000}"/>
+          </ac:graphicFrameMkLst>
+        </pc:graphicFrameChg>
+        <pc:graphicFrameChg chg="mod modGraphic">
+          <ac:chgData name="Benjamín de Jesús Cueva Niño de Guzmán" userId="56da303013910523" providerId="LiveId" clId="{532B7A48-8887-4F62-9537-0BA1FAE83637}" dt="2026-03-02T06:19:01.997" v="162" actId="962"/>
+          <ac:graphicFrameMkLst>
+            <pc:docMk/>
+            <pc:sldMk cId="2249577745" sldId="339"/>
+            <ac:graphicFrameMk id="20" creationId="{00000000-0000-0000-0000-000000000000}"/>
+          </ac:graphicFrameMkLst>
+        </pc:graphicFrameChg>
+      </pc:sldChg>
+    </pc:docChg>
+  </pc:docChgLst>
+</pc:chgInfo>
+</file>
+
 <file path=ppt/handoutMasters/handoutMaster1.xml><?xml version="1.0" encoding="utf-8"?>
 <p:handoutMaster xmlns:a="http://schemas.openxmlformats.org/drawingml/2006/main" xmlns:r="http://schemas.openxmlformats.org/officeDocument/2006/relationships" xmlns:p="http://schemas.openxmlformats.org/presentationml/2006/main">
   <p:cSld>
@@ -201,7 +341,7 @@
           <a:p>
             <a:fld id="{03C7FEFC-EB52-44D6-B3F1-2A7BB7FA4226}" type="datetimeFigureOut">
               <a:rPr lang="es-PE" smtClean="0"/>
-              <a:t>2/02/2026</a:t>
+              <a:t>7/06/2026</a:t>
             </a:fld>
             <a:endParaRPr lang="es-PE" dirty="0"/>
           </a:p>
@@ -366,7 +506,7 @@
           <a:p>
             <a:fld id="{64955E78-CBAA-441B-9163-D9CD5E983BDA}" type="datetimeFigureOut">
               <a:rPr lang="en-US" smtClean="0"/>
-              <a:t>2/2/2026</a:t>
+              <a:t>6/7/2026</a:t>
             </a:fld>
             <a:endParaRPr lang="en-US" dirty="0"/>
           </a:p>
@@ -943,7 +1083,7 @@
           <a:p>
             <a:fld id="{5C4C4E00-4716-4B48-9D97-535E4F94A274}" type="datetimeFigureOut">
               <a:rPr lang="es-PE" smtClean="0"/>
-              <a:t>2/02/2026</a:t>
+              <a:t>7/06/2026</a:t>
             </a:fld>
             <a:endParaRPr lang="es-PE" dirty="0"/>
           </a:p>
@@ -1113,7 +1253,7 @@
           <a:p>
             <a:fld id="{5C4C4E00-4716-4B48-9D97-535E4F94A274}" type="datetimeFigureOut">
               <a:rPr lang="es-PE" smtClean="0"/>
-              <a:t>2/02/2026</a:t>
+              <a:t>7/06/2026</a:t>
             </a:fld>
             <a:endParaRPr lang="es-PE" dirty="0"/>
           </a:p>
@@ -1293,7 +1433,7 @@
           <a:p>
             <a:fld id="{5C4C4E00-4716-4B48-9D97-535E4F94A274}" type="datetimeFigureOut">
               <a:rPr lang="es-PE" smtClean="0"/>
-              <a:t>2/02/2026</a:t>
+              <a:t>7/06/2026</a:t>
             </a:fld>
             <a:endParaRPr lang="es-PE" dirty="0"/>
           </a:p>
@@ -1463,7 +1603,7 @@
           <a:p>
             <a:fld id="{5C4C4E00-4716-4B48-9D97-535E4F94A274}" type="datetimeFigureOut">
               <a:rPr lang="es-PE" smtClean="0"/>
-              <a:t>2/02/2026</a:t>
+              <a:t>7/06/2026</a:t>
             </a:fld>
             <a:endParaRPr lang="es-PE" dirty="0"/>
           </a:p>
@@ -1707,7 +1847,7 @@
           <a:p>
             <a:fld id="{5C4C4E00-4716-4B48-9D97-535E4F94A274}" type="datetimeFigureOut">
               <a:rPr lang="es-PE" smtClean="0"/>
-              <a:t>2/02/2026</a:t>
+              <a:t>7/06/2026</a:t>
             </a:fld>
             <a:endParaRPr lang="es-PE" dirty="0"/>
           </a:p>
@@ -1939,7 +2079,7 @@
           <a:p>
             <a:fld id="{5C4C4E00-4716-4B48-9D97-535E4F94A274}" type="datetimeFigureOut">
               <a:rPr lang="es-PE" smtClean="0"/>
-              <a:t>2/02/2026</a:t>
+              <a:t>7/06/2026</a:t>
             </a:fld>
             <a:endParaRPr lang="es-PE" dirty="0"/>
           </a:p>
@@ -2306,7 +2446,7 @@
           <a:p>
             <a:fld id="{5C4C4E00-4716-4B48-9D97-535E4F94A274}" type="datetimeFigureOut">
               <a:rPr lang="es-PE" smtClean="0"/>
-              <a:t>2/02/2026</a:t>
+              <a:t>7/06/2026</a:t>
             </a:fld>
             <a:endParaRPr lang="es-PE" dirty="0"/>
           </a:p>
@@ -2424,7 +2564,7 @@
           <a:p>
             <a:fld id="{5C4C4E00-4716-4B48-9D97-535E4F94A274}" type="datetimeFigureOut">
               <a:rPr lang="es-PE" smtClean="0"/>
-              <a:t>2/02/2026</a:t>
+              <a:t>7/06/2026</a:t>
             </a:fld>
             <a:endParaRPr lang="es-PE" dirty="0"/>
           </a:p>
@@ -2519,7 +2659,7 @@
           <a:p>
             <a:fld id="{5C4C4E00-4716-4B48-9D97-535E4F94A274}" type="datetimeFigureOut">
               <a:rPr lang="es-PE" smtClean="0"/>
-              <a:t>2/02/2026</a:t>
+              <a:t>7/06/2026</a:t>
             </a:fld>
             <a:endParaRPr lang="es-PE" dirty="0"/>
           </a:p>
@@ -2796,7 +2936,7 @@
           <a:p>
             <a:fld id="{5C4C4E00-4716-4B48-9D97-535E4F94A274}" type="datetimeFigureOut">
               <a:rPr lang="es-PE" smtClean="0"/>
-              <a:t>2/02/2026</a:t>
+              <a:t>7/06/2026</a:t>
             </a:fld>
             <a:endParaRPr lang="es-PE" dirty="0"/>
           </a:p>
@@ -3053,7 +3193,7 @@
           <a:p>
             <a:fld id="{5C4C4E00-4716-4B48-9D97-535E4F94A274}" type="datetimeFigureOut">
               <a:rPr lang="es-PE" smtClean="0"/>
-              <a:t>2/02/2026</a:t>
+              <a:t>7/06/2026</a:t>
             </a:fld>
             <a:endParaRPr lang="es-PE" dirty="0"/>
           </a:p>
@@ -3266,7 +3406,7 @@
           <a:p>
             <a:fld id="{5C4C4E00-4716-4B48-9D97-535E4F94A274}" type="datetimeFigureOut">
               <a:rPr lang="es-PE" smtClean="0"/>
-              <a:t>2/02/2026</a:t>
+              <a:t>7/06/2026</a:t>
             </a:fld>
             <a:endParaRPr lang="es-PE" dirty="0"/>
           </a:p>
@@ -3780,7 +3920,7 @@
         </p:nvSpPr>
         <p:spPr>
           <a:xfrm>
-            <a:off x="2724320" y="2654395"/>
+            <a:off x="2724320" y="2614054"/>
             <a:ext cx="1409360" cy="369332"/>
           </a:xfrm>
           <a:prstGeom prst="rect">
@@ -3810,7 +3950,7 @@
         </p:nvSpPr>
         <p:spPr>
           <a:xfrm>
-            <a:off x="804725" y="3831222"/>
+            <a:off x="804725" y="3763987"/>
             <a:ext cx="5248553" cy="338554"/>
           </a:xfrm>
           <a:prstGeom prst="rect">
@@ -3836,14 +3976,14 @@
       </p:sp>
       <p:sp>
         <p:nvSpPr>
-          <p:cNvPr id="18" name="CuadroTexto 17"/>
+          <p:cNvPr id="33" name="CuadroTexto 32"/>
           <p:cNvSpPr txBox="1"/>
           <p:nvPr/>
         </p:nvSpPr>
         <p:spPr>
           <a:xfrm>
-            <a:off x="384576" y="5018737"/>
-            <a:ext cx="6088849" cy="830997"/>
+            <a:off x="618878" y="2880014"/>
+            <a:ext cx="5620244" cy="954107"/>
           </a:xfrm>
           <a:prstGeom prst="rect">
             <a:avLst/>
@@ -3855,6 +3995,74 @@
             <a:spAutoFit/>
           </a:bodyPr>
           <a:lstStyle/>
+          <a:p>
+            <a:pPr algn="ctr"/>
+            <a:r>
+              <a:rPr lang="es-ES" sz="2800" dirty="0">
+                <a:latin typeface="Baskerville Old Face" panose="02020602080505020303" pitchFamily="18" charset="0"/>
+              </a:rPr>
+              <a:t>{{NOMBRES}}</a:t>
+            </a:r>
+          </a:p>
+          <a:p>
+            <a:pPr algn="ctr"/>
+            <a:r>
+              <a:rPr lang="es-ES" sz="2800" dirty="0">
+                <a:latin typeface="Baskerville Old Face" panose="02020602080505020303" pitchFamily="18" charset="0"/>
+              </a:rPr>
+              <a:t>{{APELLIDOS}}</a:t>
+            </a:r>
+          </a:p>
+        </p:txBody>
+      </p:sp>
+      <p:sp>
+        <p:nvSpPr>
+          <p:cNvPr id="31" name="PH_CONTENIDO_PRINCIPAL"/>
+          <p:cNvSpPr txBox="1"/>
+          <p:nvPr/>
+        </p:nvSpPr>
+        <p:spPr>
+          <a:xfrm>
+            <a:off x="406666" y="4044576"/>
+            <a:ext cx="6044668" cy="2431435"/>
+          </a:xfrm>
+          <a:prstGeom prst="rect">
+            <a:avLst/>
+          </a:prstGeom>
+          <a:noFill/>
+        </p:spPr>
+        <p:txBody>
+          <a:bodyPr wrap="square" rtlCol="0" anchor="t" anchorCtr="1">
+            <a:spAutoFit/>
+          </a:bodyPr>
+          <a:lstStyle/>
+          <a:p>
+            <a:pPr algn="ctr"/>
+            <a:r>
+              <a:rPr lang="es-PE" sz="2700" dirty="0">
+                <a:latin typeface="Baskerville Old Face" panose="02020602080505020303" pitchFamily="18" charset="0"/>
+              </a:rPr>
+              <a:t>“</a:t>
+            </a:r>
+            <a:r>
+              <a:rPr lang="es-ES" sz="2800" dirty="0">
+                <a:latin typeface="Baskerville Old Face" panose="02020602080505020303" pitchFamily="18" charset="0"/>
+              </a:rPr>
+              <a:t>{{TEMA_DIPLOMADO}}</a:t>
+            </a:r>
+            <a:r>
+              <a:rPr lang="es-PE" sz="2800" dirty="0">
+                <a:latin typeface="Baskerville Old Face" panose="02020602080505020303" pitchFamily="18" charset="0"/>
+              </a:rPr>
+              <a:t>”</a:t>
+            </a:r>
+          </a:p>
+          <a:p>
+            <a:pPr algn="ctr"/>
+            <a:endParaRPr lang="es-PE" sz="400" dirty="0">
+              <a:latin typeface="Baskerville Old Face" panose="02020602080505020303" pitchFamily="18" charset="0"/>
+            </a:endParaRPr>
+          </a:p>
           <a:p>
             <a:pPr algn="ctr"/>
             <a:r>
@@ -3883,7 +4091,10 @@
               </a:rPr>
               <a:t>.</a:t>
             </a:r>
-            <a:endParaRPr lang="es-PE" sz="900" dirty="0">
+          </a:p>
+          <a:p>
+            <a:pPr algn="ctr"/>
+            <a:endParaRPr lang="es-PE" sz="400" dirty="0">
               <a:solidFill>
                 <a:srgbClr val="000000"/>
               </a:solidFill>
@@ -3892,29 +4103,6 @@
               <a:cs typeface="Times New Roman" panose="02020603050405020304" pitchFamily="18" charset="0"/>
             </a:endParaRPr>
           </a:p>
-        </p:txBody>
-      </p:sp>
-      <p:sp>
-        <p:nvSpPr>
-          <p:cNvPr id="20" name="CuadroTexto 19"/>
-          <p:cNvSpPr txBox="1"/>
-          <p:nvPr/>
-        </p:nvSpPr>
-        <p:spPr>
-          <a:xfrm>
-            <a:off x="387143" y="5605359"/>
-            <a:ext cx="6083718" cy="584775"/>
-          </a:xfrm>
-          <a:prstGeom prst="rect">
-            <a:avLst/>
-          </a:prstGeom>
-          <a:noFill/>
-        </p:spPr>
-        <p:txBody>
-          <a:bodyPr wrap="none" rtlCol="0">
-            <a:spAutoFit/>
-          </a:bodyPr>
-          <a:lstStyle/>
           <a:p>
             <a:pPr algn="ctr"/>
             <a:r>
@@ -3935,89 +4123,25 @@
               <a:t>consideraciones que le corresponden.</a:t>
             </a:r>
           </a:p>
-        </p:txBody>
-      </p:sp>
-      <p:sp>
-        <p:nvSpPr>
-          <p:cNvPr id="33" name="CuadroTexto 32"/>
-          <p:cNvSpPr txBox="1"/>
-          <p:nvPr/>
-        </p:nvSpPr>
-        <p:spPr>
-          <a:xfrm>
-            <a:off x="618878" y="2960696"/>
-            <a:ext cx="5620244" cy="954107"/>
-          </a:xfrm>
-          <a:prstGeom prst="rect">
-            <a:avLst/>
-          </a:prstGeom>
-          <a:noFill/>
-        </p:spPr>
-        <p:txBody>
-          <a:bodyPr wrap="square" rtlCol="0">
-            <a:spAutoFit/>
-          </a:bodyPr>
-          <a:lstStyle/>
           <a:p>
             <a:pPr algn="ctr"/>
-            <a:r>
-              <a:rPr lang="es-ES" sz="2800" dirty="0">
+            <a:endParaRPr lang="es-PE" sz="400" dirty="0">
+              <a:latin typeface="Baskerville Old Face" panose="02020602080505020303" pitchFamily="18" charset="0"/>
+            </a:endParaRPr>
+          </a:p>
+          <a:p>
+            <a:pPr algn="ctr"/>
+            <a:r>
+              <a:rPr lang="es-PE" sz="1600">
                 <a:latin typeface="Baskerville Old Face" panose="02020602080505020303" pitchFamily="18" charset="0"/>
               </a:rPr>
-              <a:t>{{NOMBRES}}</a:t>
-            </a:r>
-          </a:p>
-          <a:p>
-            <a:pPr algn="ctr"/>
-            <a:r>
-              <a:rPr lang="es-ES" sz="2800" dirty="0">
+              <a:t>                                                         {{CIUDAD}}, </a:t>
+            </a:r>
+            <a:r>
+              <a:rPr lang="es-PE" sz="1600" dirty="0">
                 <a:latin typeface="Baskerville Old Face" panose="02020602080505020303" pitchFamily="18" charset="0"/>
               </a:rPr>
-              <a:t>{{APELLIDOS}}</a:t>
-            </a:r>
-          </a:p>
-        </p:txBody>
-      </p:sp>
-      <p:sp>
-        <p:nvSpPr>
-          <p:cNvPr id="31" name="CuadroTexto 30"/>
-          <p:cNvSpPr txBox="1"/>
-          <p:nvPr/>
-        </p:nvSpPr>
-        <p:spPr>
-          <a:xfrm>
-            <a:off x="533051" y="4152152"/>
-            <a:ext cx="5791898" cy="523220"/>
-          </a:xfrm>
-          <a:prstGeom prst="rect">
-            <a:avLst/>
-          </a:prstGeom>
-          <a:noFill/>
-        </p:spPr>
-        <p:txBody>
-          <a:bodyPr wrap="square" rtlCol="0">
-            <a:spAutoFit/>
-          </a:bodyPr>
-          <a:lstStyle/>
-          <a:p>
-            <a:pPr algn="ctr"/>
-            <a:r>
-              <a:rPr lang="es-PE" sz="2700" dirty="0">
-                <a:latin typeface="Baskerville Old Face" panose="02020602080505020303" pitchFamily="18" charset="0"/>
-              </a:rPr>
-              <a:t>“</a:t>
-            </a:r>
-            <a:r>
-              <a:rPr lang="es-ES" sz="2800" dirty="0">
-                <a:latin typeface="Baskerville Old Face" panose="02020602080505020303" pitchFamily="18" charset="0"/>
-              </a:rPr>
-              <a:t>{{TEMA_DIPLOMADO}}</a:t>
-            </a:r>
-            <a:r>
-              <a:rPr lang="es-PE" sz="2800" dirty="0">
-                <a:latin typeface="Baskerville Old Face" panose="02020602080505020303" pitchFamily="18" charset="0"/>
-              </a:rPr>
-              <a:t>”</a:t>
+              <a:t>{{FECHA_EMISION_LARGA}}</a:t>
             </a:r>
           </a:p>
         </p:txBody>
@@ -4487,44 +4611,6 @@
           </p:txBody>
         </p:sp>
       </p:grpSp>
-      <p:sp>
-        <p:nvSpPr>
-          <p:cNvPr id="2" name="CuadroTexto 1">
-            <a:extLst>
-              <a:ext uri="{FF2B5EF4-FFF2-40B4-BE49-F238E27FC236}">
-                <a16:creationId xmlns:a16="http://schemas.microsoft.com/office/drawing/2014/main" id="{FEAA4293-5045-7AA5-190D-88DFB9E5E5EA}"/>
-              </a:ext>
-            </a:extLst>
-          </p:cNvPr>
-          <p:cNvSpPr txBox="1"/>
-          <p:nvPr/>
-        </p:nvSpPr>
-        <p:spPr>
-          <a:xfrm>
-            <a:off x="2850325" y="6375176"/>
-            <a:ext cx="3623108" cy="338554"/>
-          </a:xfrm>
-          <a:prstGeom prst="rect">
-            <a:avLst/>
-          </a:prstGeom>
-          <a:noFill/>
-        </p:spPr>
-        <p:txBody>
-          <a:bodyPr wrap="none" rtlCol="0">
-            <a:spAutoFit/>
-          </a:bodyPr>
-          <a:lstStyle/>
-          <a:p>
-            <a:pPr algn="r"/>
-            <a:r>
-              <a:rPr lang="es-PE" sz="1600" dirty="0">
-                <a:latin typeface="Baskerville Old Face" panose="02020602080505020303" pitchFamily="18" charset="0"/>
-              </a:rPr>
-              <a:t>Trujillo, {{FECHA_EMISION_LARGA}}</a:t>
-            </a:r>
-          </a:p>
-        </p:txBody>
-      </p:sp>
     </p:spTree>
     <p:extLst>
       <p:ext uri="{BB962C8B-B14F-4D97-AF65-F5344CB8AC3E}">
@@ -4846,14 +4932,14 @@
           <p:nvPr>
             <p:extLst>
               <p:ext uri="{D42A27DB-BD31-4B8C-83A1-F6EECF244321}">
-                <p14:modId xmlns:p14="http://schemas.microsoft.com/office/powerpoint/2010/main" val="1714684353"/>
+                <p14:modId xmlns:p14="http://schemas.microsoft.com/office/powerpoint/2010/main" val="2794344501"/>
               </p:ext>
             </p:extLst>
           </p:nvPr>
         </p:nvGraphicFramePr>
         <p:xfrm>
           <a:off x="611665" y="7771187"/>
-          <a:ext cx="2251851" cy="1959750"/>
+          <a:ext cx="2268000" cy="1959750"/>
         </p:xfrm>
         <a:graphic>
           <a:graphicData uri="http://schemas.openxmlformats.org/drawingml/2006/table">
@@ -4862,14 +4948,14 @@
                 <a:tableStyleId>{F2DE63D5-997A-4646-A377-4702673A728D}</a:tableStyleId>
               </a:tblPr>
               <a:tblGrid>
-                <a:gridCol w="1119432">
+                <a:gridCol w="1127460">
                   <a:extLst>
                     <a:ext uri="{9D8B030D-6E8A-4147-A177-3AD203B41FA5}">
                       <a16:colId xmlns:a16="http://schemas.microsoft.com/office/drawing/2014/main" val="3956221826"/>
                     </a:ext>
                   </a:extLst>
                 </a:gridCol>
-                <a:gridCol w="1132419">
+                <a:gridCol w="1140540">
                   <a:extLst>
                     <a:ext uri="{9D8B030D-6E8A-4147-A177-3AD203B41FA5}">
                       <a16:colId xmlns:a16="http://schemas.microsoft.com/office/drawing/2014/main" val="3056520887"/>
@@ -5076,7 +5162,7 @@
       </p:graphicFrame>
       <p:sp>
         <p:nvSpPr>
-          <p:cNvPr id="15" name="Rectángulo 14"/>
+          <p:cNvPr id="15" name="PH_TEMA"/>
           <p:cNvSpPr/>
           <p:nvPr/>
         </p:nvSpPr>
@@ -5168,20 +5254,20 @@
       </p:pic>
       <p:graphicFrame>
         <p:nvGraphicFramePr>
-          <p:cNvPr id="20" name="Tabla 19"/>
+          <p:cNvPr id="20" name="PH_TABLA"/>
           <p:cNvGraphicFramePr>
             <a:graphicFrameLocks noGrp="1"/>
           </p:cNvGraphicFramePr>
           <p:nvPr>
             <p:extLst>
               <p:ext uri="{D42A27DB-BD31-4B8C-83A1-F6EECF244321}">
-                <p14:modId xmlns:p14="http://schemas.microsoft.com/office/powerpoint/2010/main" val="3049477923"/>
+                <p14:modId xmlns:p14="http://schemas.microsoft.com/office/powerpoint/2010/main" val="3935535178"/>
               </p:ext>
             </p:extLst>
           </p:nvPr>
         </p:nvGraphicFramePr>
         <p:xfrm>
-          <a:off x="745017" y="2796175"/>
+          <a:off x="745017" y="2809622"/>
           <a:ext cx="5367967" cy="5481882"/>
         </p:xfrm>
         <a:graphic>
@@ -5360,7 +5446,7 @@
                     <a:p>
                       <a:pPr algn="ctr"/>
                       <a:r>
-                        <a:rPr lang="en-US" sz="1000" b="0" dirty="0">
+                        <a:rPr lang="en-US" sz="900" b="0" dirty="0">
                           <a:solidFill>
                             <a:schemeClr val="tx1"/>
                           </a:solidFill>
@@ -5468,7 +5554,7 @@
                     <a:p>
                       <a:pPr algn="ctr"/>
                       <a:r>
-                        <a:rPr lang="en-US" sz="1000" b="0" dirty="0"/>
+                        <a:rPr lang="en-US" sz="900" b="0" dirty="0"/>
                         <a:t>{{MODULO_2}}</a:t>
                       </a:r>
                     </a:p>
@@ -5556,7 +5642,7 @@
                     <a:p>
                       <a:pPr algn="ctr"/>
                       <a:r>
-                        <a:rPr lang="en-US" sz="1000" b="0" dirty="0"/>
+                        <a:rPr lang="en-US" sz="900" b="0" dirty="0"/>
                         <a:t>{{MODULO_3}}</a:t>
                       </a:r>
                     </a:p>
@@ -5660,7 +5746,7 @@
                     <a:p>
                       <a:pPr algn="ctr"/>
                       <a:r>
-                        <a:rPr lang="en-US" sz="1000" b="0" dirty="0"/>
+                        <a:rPr lang="en-US" sz="900" b="0" dirty="0"/>
                         <a:t>{{MODULO_4}}</a:t>
                       </a:r>
                     </a:p>
@@ -5764,7 +5850,7 @@
                     <a:p>
                       <a:pPr algn="ctr"/>
                       <a:r>
-                        <a:rPr lang="en-US" sz="1000" b="0" dirty="0"/>
+                        <a:rPr lang="en-US" sz="900" b="0" dirty="0"/>
                         <a:t>{{MODULO_5}}</a:t>
                       </a:r>
                     </a:p>
@@ -5868,7 +5954,7 @@
                     <a:p>
                       <a:pPr algn="ctr"/>
                       <a:r>
-                        <a:rPr lang="en-US" sz="1000" b="0" dirty="0"/>
+                        <a:rPr lang="en-US" sz="900" b="0" dirty="0"/>
                         <a:t>{{MODULO_6}}</a:t>
                       </a:r>
                     </a:p>
@@ -5967,7 +6053,7 @@
                     <a:p>
                       <a:pPr algn="ctr"/>
                       <a:r>
-                        <a:rPr lang="en-US" sz="1000" b="0" dirty="0"/>
+                        <a:rPr lang="en-US" sz="900" b="0" dirty="0"/>
                         <a:t>{{MODULO_7}}</a:t>
                       </a:r>
                     </a:p>
@@ -6074,7 +6160,7 @@
                     <a:p>
                       <a:pPr algn="ctr"/>
                       <a:r>
-                        <a:rPr lang="en-US" sz="1000" b="0" dirty="0"/>
+                        <a:rPr lang="en-US" sz="900" b="0" dirty="0"/>
                         <a:t>{{MODULO_8}}</a:t>
                       </a:r>
                     </a:p>
@@ -6452,67 +6538,6 @@
       </p:grpSp>
       <p:sp>
         <p:nvSpPr>
-          <p:cNvPr id="7" name="Rectángulo 6">
-            <a:extLst>
-              <a:ext uri="{FF2B5EF4-FFF2-40B4-BE49-F238E27FC236}">
-                <a16:creationId xmlns:a16="http://schemas.microsoft.com/office/drawing/2014/main" id="{05C52596-06F9-34E5-BF0B-633F1D4E78A2}"/>
-              </a:ext>
-            </a:extLst>
-          </p:cNvPr>
-          <p:cNvSpPr/>
-          <p:nvPr/>
-        </p:nvSpPr>
-        <p:spPr>
-          <a:xfrm>
-            <a:off x="4541929" y="8673847"/>
-            <a:ext cx="2130198" cy="382156"/>
-          </a:xfrm>
-          <a:prstGeom prst="rect">
-            <a:avLst/>
-          </a:prstGeom>
-        </p:spPr>
-        <p:txBody>
-          <a:bodyPr wrap="square">
-            <a:spAutoFit/>
-          </a:bodyPr>
-          <a:lstStyle/>
-          <a:p>
-            <a:pPr lvl="0" algn="ctr">
-              <a:spcBef>
-                <a:spcPts val="59"/>
-              </a:spcBef>
-            </a:pPr>
-            <a:r>
-              <a:rPr lang="es-PE" sz="900" dirty="0">
-                <a:solidFill>
-                  <a:prstClr val="black"/>
-                </a:solidFill>
-                <a:latin typeface="Times New Roman" panose="02020603050405020304" pitchFamily="18" charset="0"/>
-                <a:ea typeface="Cambria Math" panose="02040503050406030204" pitchFamily="18" charset="0"/>
-                <a:cs typeface="Times New Roman" panose="02020603050405020304" pitchFamily="18" charset="0"/>
-              </a:rPr>
-              <a:t>CÓDIGO ESTUDIANTE:</a:t>
-            </a:r>
-          </a:p>
-          <a:p>
-            <a:pPr lvl="0" algn="ctr">
-              <a:spcBef>
-                <a:spcPts val="59"/>
-              </a:spcBef>
-            </a:pPr>
-            <a:endParaRPr lang="es-PE" sz="900" dirty="0">
-              <a:solidFill>
-                <a:prstClr val="black"/>
-              </a:solidFill>
-              <a:latin typeface="Times New Roman" panose="02020603050405020304" pitchFamily="18" charset="0"/>
-              <a:ea typeface="Cambria Math" panose="02040503050406030204" pitchFamily="18" charset="0"/>
-              <a:cs typeface="Times New Roman" panose="02020603050405020304" pitchFamily="18" charset="0"/>
-            </a:endParaRPr>
-          </a:p>
-        </p:txBody>
-      </p:sp>
-      <p:sp>
-        <p:nvSpPr>
           <p:cNvPr id="2" name="CuadroTexto 1">
             <a:extLst>
               <a:ext uri="{FF2B5EF4-FFF2-40B4-BE49-F238E27FC236}">
@@ -6543,6 +6568,78 @@
               <a:rPr lang="es-PE" dirty="0"/>
               <a:t>{{QR_CODE}}</a:t>
             </a:r>
+          </a:p>
+        </p:txBody>
+      </p:sp>
+      <p:sp>
+        <p:nvSpPr>
+          <p:cNvPr id="9" name="Rectángulo 8">
+            <a:extLst>
+              <a:ext uri="{FF2B5EF4-FFF2-40B4-BE49-F238E27FC236}">
+                <a16:creationId xmlns:a16="http://schemas.microsoft.com/office/drawing/2014/main" id="{69756D5F-F72B-4A51-481B-0F48F851A7E8}"/>
+              </a:ext>
+            </a:extLst>
+          </p:cNvPr>
+          <p:cNvSpPr/>
+          <p:nvPr/>
+        </p:nvSpPr>
+        <p:spPr>
+          <a:xfrm>
+            <a:off x="4541929" y="8673847"/>
+            <a:ext cx="2130198" cy="382156"/>
+          </a:xfrm>
+          <a:prstGeom prst="rect">
+            <a:avLst/>
+          </a:prstGeom>
+        </p:spPr>
+        <p:txBody>
+          <a:bodyPr wrap="square">
+            <a:spAutoFit/>
+          </a:bodyPr>
+          <a:lstStyle/>
+          <a:p>
+            <a:pPr lvl="0" algn="ctr">
+              <a:spcBef>
+                <a:spcPts val="59"/>
+              </a:spcBef>
+            </a:pPr>
+            <a:r>
+              <a:rPr lang="es-PE" sz="900" dirty="0">
+                <a:solidFill>
+                  <a:prstClr val="black"/>
+                </a:solidFill>
+                <a:latin typeface="Times New Roman" panose="02020603050405020304" pitchFamily="18" charset="0"/>
+                <a:ea typeface="Cambria Math" panose="02040503050406030204" pitchFamily="18" charset="0"/>
+                <a:cs typeface="Times New Roman" panose="02020603050405020304" pitchFamily="18" charset="0"/>
+              </a:rPr>
+              <a:t>CÓDIGO ESTUDIANTE:</a:t>
+            </a:r>
+          </a:p>
+          <a:p>
+            <a:pPr lvl="0" algn="ctr">
+              <a:spcBef>
+                <a:spcPts val="59"/>
+              </a:spcBef>
+            </a:pPr>
+            <a:r>
+              <a:rPr lang="es-PE" sz="900" b="1">
+                <a:solidFill>
+                  <a:prstClr val="black"/>
+                </a:solidFill>
+                <a:latin typeface="Times New Roman" panose="02020603050405020304" pitchFamily="18" charset="0"/>
+                <a:ea typeface="Cambria Math" panose="02040503050406030204" pitchFamily="18" charset="0"/>
+                <a:cs typeface="Times New Roman" panose="02020603050405020304" pitchFamily="18" charset="0"/>
+              </a:rPr>
+              <a:t>{{CODE_STUDENT}}</a:t>
+            </a:r>
+            <a:endParaRPr lang="es-PE" sz="900" b="1" dirty="0">
+              <a:solidFill>
+                <a:prstClr val="black"/>
+              </a:solidFill>
+              <a:latin typeface="Times New Roman" panose="02020603050405020304" pitchFamily="18" charset="0"/>
+              <a:ea typeface="Cambria Math" panose="02040503050406030204" pitchFamily="18" charset="0"/>
+              <a:cs typeface="Times New Roman" panose="02020603050405020304" pitchFamily="18" charset="0"/>
+            </a:endParaRPr>
           </a:p>
         </p:txBody>
       </p:sp>
